--- a/PPTs/L5-Exercises ANS.pptx
+++ b/PPTs/L5-Exercises ANS.pptx
@@ -174,6 +174,131 @@
 </p:presentation>
 </file>
 
+<file path=ppt/revisionInfo.xml><?xml version="1.0" encoding="utf-8"?>
+<p1510:revInfo xmlns:a="http://schemas.openxmlformats.org/drawingml/2006/main" xmlns:r="http://schemas.openxmlformats.org/officeDocument/2006/relationships" xmlns:p1510="http://schemas.microsoft.com/office/powerpoint/2015/10/main">
+  <p1510:revLst>
+    <p1510:client id="{A0945E83-6F55-4A9C-A9C1-CD1F7089783B}" v="7" dt="2025-10-03T00:44:00.893"/>
+  </p1510:revLst>
+</p1510:revInfo>
+</file>
+
+<file path=ppt/changesInfos/changesInfo1.xml><?xml version="1.0" encoding="utf-8"?>
+<pc:chgInfo xmlns:a="http://schemas.openxmlformats.org/drawingml/2006/main" xmlns:r="http://schemas.openxmlformats.org/officeDocument/2006/relationships" xmlns:ac="http://schemas.microsoft.com/office/drawing/2013/main/command" xmlns:pc="http://schemas.microsoft.com/office/powerpoint/2013/main/command">
+  <pc:docChgLst>
+    <pc:chgData name="Zonghua Gu" userId="9a7e1853e1951ef5" providerId="LiveId" clId="{CF1FAA12-072C-4ED5-BA76-0FFFAEFDB88A}"/>
+    <pc:docChg chg="custSel modSld">
+      <pc:chgData name="Zonghua Gu" userId="9a7e1853e1951ef5" providerId="LiveId" clId="{CF1FAA12-072C-4ED5-BA76-0FFFAEFDB88A}" dt="2025-10-03T00:44:10.102" v="278" actId="20577"/>
+      <pc:docMkLst>
+        <pc:docMk/>
+      </pc:docMkLst>
+      <pc:sldChg chg="addSp modSp mod">
+        <pc:chgData name="Zonghua Gu" userId="9a7e1853e1951ef5" providerId="LiveId" clId="{CF1FAA12-072C-4ED5-BA76-0FFFAEFDB88A}" dt="2025-10-03T00:44:10.102" v="278" actId="20577"/>
+        <pc:sldMkLst>
+          <pc:docMk/>
+          <pc:sldMk cId="4004612482" sldId="1505"/>
+        </pc:sldMkLst>
+        <pc:spChg chg="mod">
+          <ac:chgData name="Zonghua Gu" userId="9a7e1853e1951ef5" providerId="LiveId" clId="{CF1FAA12-072C-4ED5-BA76-0FFFAEFDB88A}" dt="2025-10-03T00:42:24.075" v="218" actId="1076"/>
+          <ac:spMkLst>
+            <pc:docMk/>
+            <pc:sldMk cId="4004612482" sldId="1505"/>
+            <ac:spMk id="2" creationId="{F6CA6576-C415-5FE8-27A3-075448AAE703}"/>
+          </ac:spMkLst>
+        </pc:spChg>
+        <pc:spChg chg="add mod">
+          <ac:chgData name="Zonghua Gu" userId="9a7e1853e1951ef5" providerId="LiveId" clId="{CF1FAA12-072C-4ED5-BA76-0FFFAEFDB88A}" dt="2025-10-03T00:44:10.102" v="278" actId="20577"/>
+          <ac:spMkLst>
+            <pc:docMk/>
+            <pc:sldMk cId="4004612482" sldId="1505"/>
+            <ac:spMk id="3" creationId="{F13E486A-E64F-A8E0-CD86-0195293CF369}"/>
+          </ac:spMkLst>
+        </pc:spChg>
+        <pc:spChg chg="mod">
+          <ac:chgData name="Zonghua Gu" userId="9a7e1853e1951ef5" providerId="LiveId" clId="{CF1FAA12-072C-4ED5-BA76-0FFFAEFDB88A}" dt="2025-10-03T00:36:19.490" v="10" actId="1035"/>
+          <ac:spMkLst>
+            <pc:docMk/>
+            <pc:sldMk cId="4004612482" sldId="1505"/>
+            <ac:spMk id="9" creationId="{53D9FB4D-71DC-9670-0457-FF52A713A203}"/>
+          </ac:spMkLst>
+        </pc:spChg>
+        <pc:spChg chg="mod">
+          <ac:chgData name="Zonghua Gu" userId="9a7e1853e1951ef5" providerId="LiveId" clId="{CF1FAA12-072C-4ED5-BA76-0FFFAEFDB88A}" dt="2025-10-03T00:36:19.490" v="10" actId="1035"/>
+          <ac:spMkLst>
+            <pc:docMk/>
+            <pc:sldMk cId="4004612482" sldId="1505"/>
+            <ac:spMk id="10" creationId="{F3171692-EFA5-CFE4-4CF5-CF2C4418DF45}"/>
+          </ac:spMkLst>
+        </pc:spChg>
+        <pc:spChg chg="mod">
+          <ac:chgData name="Zonghua Gu" userId="9a7e1853e1951ef5" providerId="LiveId" clId="{CF1FAA12-072C-4ED5-BA76-0FFFAEFDB88A}" dt="2025-10-03T00:36:19.490" v="10" actId="1035"/>
+          <ac:spMkLst>
+            <pc:docMk/>
+            <pc:sldMk cId="4004612482" sldId="1505"/>
+            <ac:spMk id="11" creationId="{76DE50C5-903D-4D23-21EF-EBB55CE240B5}"/>
+          </ac:spMkLst>
+        </pc:spChg>
+        <pc:spChg chg="mod">
+          <ac:chgData name="Zonghua Gu" userId="9a7e1853e1951ef5" providerId="LiveId" clId="{CF1FAA12-072C-4ED5-BA76-0FFFAEFDB88A}" dt="2025-10-03T00:36:19.490" v="10" actId="1035"/>
+          <ac:spMkLst>
+            <pc:docMk/>
+            <pc:sldMk cId="4004612482" sldId="1505"/>
+            <ac:spMk id="12" creationId="{7608CC1D-A3E7-BE0E-CAF3-96BEBCB4E3E8}"/>
+          </ac:spMkLst>
+        </pc:spChg>
+        <pc:spChg chg="mod">
+          <ac:chgData name="Zonghua Gu" userId="9a7e1853e1951ef5" providerId="LiveId" clId="{CF1FAA12-072C-4ED5-BA76-0FFFAEFDB88A}" dt="2025-10-03T00:36:19.490" v="10" actId="1035"/>
+          <ac:spMkLst>
+            <pc:docMk/>
+            <pc:sldMk cId="4004612482" sldId="1505"/>
+            <ac:spMk id="13" creationId="{0845DE8D-CC0E-117A-8D00-6CF38CD9A132}"/>
+          </ac:spMkLst>
+        </pc:spChg>
+        <pc:spChg chg="mod">
+          <ac:chgData name="Zonghua Gu" userId="9a7e1853e1951ef5" providerId="LiveId" clId="{CF1FAA12-072C-4ED5-BA76-0FFFAEFDB88A}" dt="2025-10-03T00:36:19.490" v="10" actId="1035"/>
+          <ac:spMkLst>
+            <pc:docMk/>
+            <pc:sldMk cId="4004612482" sldId="1505"/>
+            <ac:spMk id="14" creationId="{41536FF2-CA6F-0D44-E8FF-57BF3E908801}"/>
+          </ac:spMkLst>
+        </pc:spChg>
+        <pc:spChg chg="mod">
+          <ac:chgData name="Zonghua Gu" userId="9a7e1853e1951ef5" providerId="LiveId" clId="{CF1FAA12-072C-4ED5-BA76-0FFFAEFDB88A}" dt="2025-10-03T00:36:19.490" v="10" actId="1035"/>
+          <ac:spMkLst>
+            <pc:docMk/>
+            <pc:sldMk cId="4004612482" sldId="1505"/>
+            <ac:spMk id="18" creationId="{5002EA4D-95EF-7455-DE42-02F716EBEBB1}"/>
+          </ac:spMkLst>
+        </pc:spChg>
+        <pc:graphicFrameChg chg="mod">
+          <ac:chgData name="Zonghua Gu" userId="9a7e1853e1951ef5" providerId="LiveId" clId="{CF1FAA12-072C-4ED5-BA76-0FFFAEFDB88A}" dt="2025-10-03T00:36:05.799" v="0" actId="1076"/>
+          <ac:graphicFrameMkLst>
+            <pc:docMk/>
+            <pc:sldMk cId="4004612482" sldId="1505"/>
+            <ac:graphicFrameMk id="8" creationId="{645EE26D-01F6-37BB-34ED-7BFA54544EA8}"/>
+          </ac:graphicFrameMkLst>
+        </pc:graphicFrameChg>
+        <pc:picChg chg="mod">
+          <ac:chgData name="Zonghua Gu" userId="9a7e1853e1951ef5" providerId="LiveId" clId="{CF1FAA12-072C-4ED5-BA76-0FFFAEFDB88A}" dt="2025-10-03T00:36:19.490" v="10" actId="1035"/>
+          <ac:picMkLst>
+            <pc:docMk/>
+            <pc:sldMk cId="4004612482" sldId="1505"/>
+            <ac:picMk id="7" creationId="{7B211E08-18A4-0B53-A853-D44C622D5577}"/>
+          </ac:picMkLst>
+        </pc:picChg>
+        <pc:cxnChg chg="mod">
+          <ac:chgData name="Zonghua Gu" userId="9a7e1853e1951ef5" providerId="LiveId" clId="{CF1FAA12-072C-4ED5-BA76-0FFFAEFDB88A}" dt="2025-10-03T00:36:19.490" v="10" actId="1035"/>
+          <ac:cxnSpMkLst>
+            <pc:docMk/>
+            <pc:sldMk cId="4004612482" sldId="1505"/>
+            <ac:cxnSpMk id="17" creationId="{2FF0BD6F-0234-4008-71A8-EF8636D9A871}"/>
+          </ac:cxnSpMkLst>
+        </pc:cxnChg>
+      </pc:sldChg>
+    </pc:docChg>
+  </pc:docChgLst>
+</pc:chgInfo>
+</file>
+
 <file path=ppt/handoutMasters/handoutMaster1.xml><?xml version="1.0" encoding="utf-8"?>
 <p:handoutMaster xmlns:a="http://schemas.openxmlformats.org/drawingml/2006/main" xmlns:r="http://schemas.openxmlformats.org/officeDocument/2006/relationships" xmlns:p="http://schemas.openxmlformats.org/presentationml/2006/main">
   <p:cSld>
@@ -222,14 +347,14 @@
           <a:effectLst/>
           <a:extLst>
             <a:ext uri="{909E8E84-426E-40dd-AFC4-6F175D3DCCD1}">
-              <a14:hiddenFill xmlns="" xmlns:a14="http://schemas.microsoft.com/office/drawing/2010/main">
+              <a14:hiddenFill xmlns:a14="http://schemas.microsoft.com/office/drawing/2010/main" xmlns="">
                 <a:solidFill>
                   <a:schemeClr val="bg1"/>
                 </a:solidFill>
               </a14:hiddenFill>
             </a:ext>
             <a:ext uri="{91240B29-F687-4f45-9708-019B960494DF}">
-              <a14:hiddenLine xmlns="" xmlns:a14="http://schemas.microsoft.com/office/drawing/2010/main" w="12700">
+              <a14:hiddenLine xmlns:a14="http://schemas.microsoft.com/office/drawing/2010/main" xmlns="" w="12700">
                 <a:pattFill prst="narHorz">
                   <a:fgClr>
                     <a:schemeClr val="tx1"/>
@@ -244,7 +369,7 @@
               </a14:hiddenLine>
             </a:ext>
             <a:ext uri="{AF507438-7753-43e0-B8FC-AC1667EBCBE1}">
-              <a14:hiddenEffects xmlns="" xmlns:a14="http://schemas.microsoft.com/office/drawing/2010/main">
+              <a14:hiddenEffects xmlns:a14="http://schemas.microsoft.com/office/drawing/2010/main" xmlns="">
                 <a:effectLst>
                   <a:outerShdw dist="35921" dir="2700000" algn="ctr" rotWithShape="0">
                     <a:schemeClr val="bg2"/>
@@ -350,14 +475,14 @@
           <a:effectLst/>
           <a:extLst>
             <a:ext uri="{909E8E84-426E-40dd-AFC4-6F175D3DCCD1}">
-              <a14:hiddenFill xmlns="" xmlns:a14="http://schemas.microsoft.com/office/drawing/2010/main">
+              <a14:hiddenFill xmlns:a14="http://schemas.microsoft.com/office/drawing/2010/main" xmlns="">
                 <a:solidFill>
                   <a:schemeClr val="bg1"/>
                 </a:solidFill>
               </a14:hiddenFill>
             </a:ext>
             <a:ext uri="{91240B29-F687-4f45-9708-019B960494DF}">
-              <a14:hiddenLine xmlns="" xmlns:a14="http://schemas.microsoft.com/office/drawing/2010/main" w="12700">
+              <a14:hiddenLine xmlns:a14="http://schemas.microsoft.com/office/drawing/2010/main" xmlns="" w="12700">
                 <a:pattFill prst="narHorz">
                   <a:fgClr>
                     <a:schemeClr val="tx1"/>
@@ -372,7 +497,7 @@
               </a14:hiddenLine>
             </a:ext>
             <a:ext uri="{AF507438-7753-43e0-B8FC-AC1667EBCBE1}">
-              <a14:hiddenEffects xmlns="" xmlns:a14="http://schemas.microsoft.com/office/drawing/2010/main">
+              <a14:hiddenEffects xmlns:a14="http://schemas.microsoft.com/office/drawing/2010/main" xmlns="">
                 <a:effectLst>
                   <a:outerShdw dist="35921" dir="2700000" algn="ctr" rotWithShape="0">
                     <a:schemeClr val="bg2"/>
@@ -440,17 +565,17 @@
           <a:effectLst/>
           <a:extLst>
             <a:ext uri="{FAA26D3D-D897-4be2-8F04-BA451C77F1D7}">
-              <ma14:placeholderFlag xmlns="" xmlns:ma14="http://schemas.microsoft.com/office/mac/drawingml/2011/main" val="1"/>
+              <ma14:placeholderFlag xmlns:ma14="http://schemas.microsoft.com/office/mac/drawingml/2011/main" xmlns="" val="1"/>
             </a:ext>
             <a:ext uri="{909E8E84-426E-40dd-AFC4-6F175D3DCCD1}">
-              <a14:hiddenFill xmlns="" xmlns:a14="http://schemas.microsoft.com/office/drawing/2010/main">
+              <a14:hiddenFill xmlns:a14="http://schemas.microsoft.com/office/drawing/2010/main" xmlns="">
                 <a:solidFill>
                   <a:srgbClr val="FFFFFF"/>
                 </a:solidFill>
               </a14:hiddenFill>
             </a:ext>
             <a:ext uri="{AF507438-7753-43e0-B8FC-AC1667EBCBE1}">
-              <a14:hiddenEffects xmlns="" xmlns:a14="http://schemas.microsoft.com/office/drawing/2010/main">
+              <a14:hiddenEffects xmlns:a14="http://schemas.microsoft.com/office/drawing/2010/main" xmlns="">
                 <a:effectLst>
                   <a:outerShdw blurRad="63500" dist="38099" dir="2700000" algn="ctr" rotWithShape="0">
                     <a:srgbClr val="000000">
@@ -461,7 +586,7 @@
               </a14:hiddenEffects>
             </a:ext>
             <a:ext uri="{53640926-AAD7-44d8-BBD7-CCE9431645EC}">
-              <a14:shadowObscured xmlns="" xmlns:a14="http://schemas.microsoft.com/office/drawing/2010/main" val="1"/>
+              <a14:shadowObscured xmlns:a14="http://schemas.microsoft.com/office/drawing/2010/main" xmlns="" val="1"/>
             </a:ext>
           </a:extLst>
         </p:spPr>
@@ -491,14 +616,14 @@
           <a:effectLst/>
           <a:extLst>
             <a:ext uri="{909E8E84-426E-40dd-AFC4-6F175D3DCCD1}">
-              <a14:hiddenFill xmlns="" xmlns:a14="http://schemas.microsoft.com/office/drawing/2010/main">
+              <a14:hiddenFill xmlns:a14="http://schemas.microsoft.com/office/drawing/2010/main" xmlns="">
                 <a:solidFill>
                   <a:schemeClr val="bg1"/>
                 </a:solidFill>
               </a14:hiddenFill>
             </a:ext>
             <a:ext uri="{91240B29-F687-4f45-9708-019B960494DF}">
-              <a14:hiddenLine xmlns="" xmlns:a14="http://schemas.microsoft.com/office/drawing/2010/main" w="12700">
+              <a14:hiddenLine xmlns:a14="http://schemas.microsoft.com/office/drawing/2010/main" xmlns="" w="12700">
                 <a:pattFill prst="narHorz">
                   <a:fgClr>
                     <a:schemeClr val="tx1"/>
@@ -513,7 +638,7 @@
               </a14:hiddenLine>
             </a:ext>
             <a:ext uri="{AF507438-7753-43e0-B8FC-AC1667EBCBE1}">
-              <a14:hiddenEffects xmlns="" xmlns:a14="http://schemas.microsoft.com/office/drawing/2010/main">
+              <a14:hiddenEffects xmlns:a14="http://schemas.microsoft.com/office/drawing/2010/main" xmlns="">
                 <a:effectLst>
                   <a:outerShdw dist="35921" dir="2700000" algn="ctr" rotWithShape="0">
                     <a:schemeClr val="bg2"/>
@@ -763,10 +888,10 @@
         <p:spPr>
           <a:extLst>
             <a:ext uri="{FAA26D3D-D897-4be2-8F04-BA451C77F1D7}">
-              <ma14:placeholderFlag xmlns="" xmlns:ma14="http://schemas.microsoft.com/office/mac/drawingml/2011/main" val="1"/>
+              <ma14:placeholderFlag xmlns:ma14="http://schemas.microsoft.com/office/mac/drawingml/2011/main" xmlns="" val="1"/>
             </a:ext>
             <a:ext uri="{AF507438-7753-43e0-B8FC-AC1667EBCBE1}">
-              <a14:hiddenEffects xmlns="" xmlns:a14="http://schemas.microsoft.com/office/drawing/2010/main">
+              <a14:hiddenEffects xmlns:a14="http://schemas.microsoft.com/office/drawing/2010/main" xmlns="">
                 <a:effectLst>
                   <a:outerShdw blurRad="63500" dist="38099" dir="2700000" algn="ctr" rotWithShape="0">
                     <a:schemeClr val="bg2">
@@ -3416,17 +3541,17 @@
           <a:effectLst/>
           <a:extLst>
             <a:ext uri="{FAA26D3D-D897-4be2-8F04-BA451C77F1D7}">
-              <ma14:placeholderFlag xmlns="" xmlns:ma14="http://schemas.microsoft.com/office/mac/drawingml/2011/main" val="1"/>
+              <ma14:placeholderFlag xmlns:ma14="http://schemas.microsoft.com/office/mac/drawingml/2011/main" xmlns="" val="1"/>
             </a:ext>
             <a:ext uri="{909E8E84-426E-40dd-AFC4-6F175D3DCCD1}">
-              <a14:hiddenFill xmlns="" xmlns:a14="http://schemas.microsoft.com/office/drawing/2010/main">
+              <a14:hiddenFill xmlns:a14="http://schemas.microsoft.com/office/drawing/2010/main" xmlns="">
                 <a:solidFill>
                   <a:schemeClr val="bg1"/>
                 </a:solidFill>
               </a14:hiddenFill>
             </a:ext>
             <a:ext uri="{91240B29-F687-4f45-9708-019B960494DF}">
-              <a14:hiddenLine xmlns="" xmlns:a14="http://schemas.microsoft.com/office/drawing/2010/main" w="12700">
+              <a14:hiddenLine xmlns:a14="http://schemas.microsoft.com/office/drawing/2010/main" xmlns="" w="12700">
                 <a:pattFill prst="narHorz">
                   <a:fgClr>
                     <a:schemeClr val="tx1"/>
@@ -3441,7 +3566,7 @@
               </a14:hiddenLine>
             </a:ext>
             <a:ext uri="{AF507438-7753-43e0-B8FC-AC1667EBCBE1}">
-              <a14:hiddenEffects xmlns="" xmlns:a14="http://schemas.microsoft.com/office/drawing/2010/main">
+              <a14:hiddenEffects xmlns:a14="http://schemas.microsoft.com/office/drawing/2010/main" xmlns="">
                 <a:effectLst>
                   <a:outerShdw blurRad="63500" dist="38099" dir="2700000" algn="ctr" rotWithShape="0">
                     <a:schemeClr val="bg2">
@@ -3494,17 +3619,17 @@
           <a:effectLst/>
           <a:extLst>
             <a:ext uri="{FAA26D3D-D897-4be2-8F04-BA451C77F1D7}">
-              <ma14:placeholderFlag xmlns="" xmlns:ma14="http://schemas.microsoft.com/office/mac/drawingml/2011/main" val="1"/>
+              <ma14:placeholderFlag xmlns:ma14="http://schemas.microsoft.com/office/mac/drawingml/2011/main" xmlns="" val="1"/>
             </a:ext>
             <a:ext uri="{909E8E84-426E-40dd-AFC4-6F175D3DCCD1}">
-              <a14:hiddenFill xmlns="" xmlns:a14="http://schemas.microsoft.com/office/drawing/2010/main">
+              <a14:hiddenFill xmlns:a14="http://schemas.microsoft.com/office/drawing/2010/main" xmlns="">
                 <a:solidFill>
                   <a:schemeClr val="bg1"/>
                 </a:solidFill>
               </a14:hiddenFill>
             </a:ext>
             <a:ext uri="{91240B29-F687-4f45-9708-019B960494DF}">
-              <a14:hiddenLine xmlns="" xmlns:a14="http://schemas.microsoft.com/office/drawing/2010/main" w="12700">
+              <a14:hiddenLine xmlns:a14="http://schemas.microsoft.com/office/drawing/2010/main" xmlns="" w="12700">
                 <a:pattFill prst="narHorz">
                   <a:fgClr>
                     <a:schemeClr val="tx1"/>
@@ -3519,7 +3644,7 @@
               </a14:hiddenLine>
             </a:ext>
             <a:ext uri="{AF507438-7753-43e0-B8FC-AC1667EBCBE1}">
-              <a14:hiddenEffects xmlns="" xmlns:a14="http://schemas.microsoft.com/office/drawing/2010/main">
+              <a14:hiddenEffects xmlns:a14="http://schemas.microsoft.com/office/drawing/2010/main" xmlns="">
                 <a:effectLst>
                   <a:outerShdw blurRad="63500" dist="38099" dir="2700000" algn="ctr" rotWithShape="0">
                     <a:schemeClr val="bg2">
@@ -3598,14 +3723,14 @@
           <a:effectLst/>
           <a:extLst>
             <a:ext uri="{909E8E84-426E-40dd-AFC4-6F175D3DCCD1}">
-              <a14:hiddenFill xmlns="" xmlns:a14="http://schemas.microsoft.com/office/drawing/2010/main">
+              <a14:hiddenFill xmlns:a14="http://schemas.microsoft.com/office/drawing/2010/main" xmlns="">
                 <a:solidFill>
                   <a:schemeClr val="bg1"/>
                 </a:solidFill>
               </a14:hiddenFill>
             </a:ext>
             <a:ext uri="{91240B29-F687-4f45-9708-019B960494DF}">
-              <a14:hiddenLine xmlns="" xmlns:a14="http://schemas.microsoft.com/office/drawing/2010/main" w="12700">
+              <a14:hiddenLine xmlns:a14="http://schemas.microsoft.com/office/drawing/2010/main" xmlns="" w="12700">
                 <a:pattFill prst="narHorz">
                   <a:fgClr>
                     <a:schemeClr val="tx1"/>
@@ -3620,7 +3745,7 @@
               </a14:hiddenLine>
             </a:ext>
             <a:ext uri="{AF507438-7753-43e0-B8FC-AC1667EBCBE1}">
-              <a14:hiddenEffects xmlns="" xmlns:a14="http://schemas.microsoft.com/office/drawing/2010/main">
+              <a14:hiddenEffects xmlns:a14="http://schemas.microsoft.com/office/drawing/2010/main" xmlns="">
                 <a:effectLst>
                   <a:outerShdw dist="35921" dir="2700000" algn="ctr" rotWithShape="0">
                     <a:schemeClr val="bg2"/>
@@ -3686,12 +3811,12 @@
           <a:effectLst/>
           <a:extLst>
             <a:ext uri="{909E8E84-426E-40dd-AFC4-6F175D3DCCD1}">
-              <a14:hiddenFill xmlns="" xmlns:a14="http://schemas.microsoft.com/office/drawing/2010/main">
+              <a14:hiddenFill xmlns:a14="http://schemas.microsoft.com/office/drawing/2010/main" xmlns="">
                 <a:noFill/>
               </a14:hiddenFill>
             </a:ext>
             <a:ext uri="{AF507438-7753-43e0-B8FC-AC1667EBCBE1}">
-              <a14:hiddenEffects xmlns="" xmlns:a14="http://schemas.microsoft.com/office/drawing/2010/main">
+              <a14:hiddenEffects xmlns:a14="http://schemas.microsoft.com/office/drawing/2010/main" xmlns="">
                 <a:effectLst>
                   <a:outerShdw blurRad="63500" dist="38099" dir="2700000" algn="ctr" rotWithShape="0">
                     <a:schemeClr val="bg2">
@@ -6084,7 +6209,7 @@
           </a:ln>
           <a:extLst>
             <a:ext uri="{AF507438-7753-43e0-B8FC-AC1667EBCBE1}">
-              <a14:hiddenEffects xmlns:a14="http://schemas.microsoft.com/office/drawing/2010/main" xmlns="">
+              <a14:hiddenEffects xmlns="" xmlns:a14="http://schemas.microsoft.com/office/drawing/2010/main">
                 <a:effectLst>
                   <a:outerShdw dist="35921" dir="2700000" algn="ctr" rotWithShape="0">
                     <a:schemeClr val="bg2"/>
@@ -6192,7 +6317,7 @@
           </a:ln>
           <a:extLst>
             <a:ext uri="{AF507438-7753-43e0-B8FC-AC1667EBCBE1}">
-              <a14:hiddenEffects xmlns:a14="http://schemas.microsoft.com/office/drawing/2010/main" xmlns="">
+              <a14:hiddenEffects xmlns="" xmlns:a14="http://schemas.microsoft.com/office/drawing/2010/main">
                 <a:effectLst>
                   <a:outerShdw dist="35921" dir="2700000" algn="ctr" rotWithShape="0">
                     <a:schemeClr val="bg2"/>
@@ -6302,7 +6427,7 @@
           </a:ln>
           <a:extLst>
             <a:ext uri="{AF507438-7753-43e0-B8FC-AC1667EBCBE1}">
-              <a14:hiddenEffects xmlns:a14="http://schemas.microsoft.com/office/drawing/2010/main" xmlns="">
+              <a14:hiddenEffects xmlns="" xmlns:a14="http://schemas.microsoft.com/office/drawing/2010/main">
                 <a:effectLst>
                   <a:outerShdw dist="35921" dir="2700000" algn="ctr" rotWithShape="0">
                     <a:schemeClr val="bg2"/>
@@ -7240,7 +7365,12 @@
             <p:ph type="title"/>
           </p:nvPr>
         </p:nvSpPr>
-        <p:spPr/>
+        <p:spPr>
+          <a:xfrm>
+            <a:off x="-902050" y="144549"/>
+            <a:ext cx="9550400" cy="533400"/>
+          </a:xfrm>
+        </p:spPr>
         <p:txBody>
           <a:bodyPr/>
           <a:lstStyle/>
@@ -7268,13 +7398,13 @@
           <p:nvPr>
             <p:extLst>
               <p:ext uri="{D42A27DB-BD31-4B8C-83A1-F6EECF244321}">
-                <p14:modId xmlns:p14="http://schemas.microsoft.com/office/powerpoint/2010/main" val="2483179076"/>
+                <p14:modId xmlns:p14="http://schemas.microsoft.com/office/powerpoint/2010/main" val="192379867"/>
               </p:ext>
             </p:extLst>
           </p:nvPr>
         </p:nvGraphicFramePr>
         <p:xfrm>
-          <a:off x="4038600" y="757989"/>
+          <a:off x="95422" y="866901"/>
           <a:ext cx="5791203" cy="2377440"/>
         </p:xfrm>
         <a:graphic>
@@ -8253,7 +8383,7 @@
         </p:blipFill>
         <p:spPr>
           <a:xfrm>
-            <a:off x="1308768" y="3429000"/>
+            <a:off x="1308768" y="3505200"/>
             <a:ext cx="9821955" cy="3256547"/>
           </a:xfrm>
           <a:prstGeom prst="rect">
@@ -8275,7 +8405,7 @@
         </p:nvSpPr>
         <p:spPr>
           <a:xfrm>
-            <a:off x="2133600" y="4739289"/>
+            <a:off x="2133600" y="4815489"/>
             <a:ext cx="495649" cy="558615"/>
           </a:xfrm>
           <a:prstGeom prst="rect">
@@ -8321,7 +8451,7 @@
         </p:nvSpPr>
         <p:spPr>
           <a:xfrm>
-            <a:off x="6286151" y="4739289"/>
+            <a:off x="6286151" y="4815489"/>
             <a:ext cx="495649" cy="558615"/>
           </a:xfrm>
           <a:prstGeom prst="rect">
@@ -8367,7 +8497,7 @@
         </p:nvSpPr>
         <p:spPr>
           <a:xfrm>
-            <a:off x="8419751" y="4739289"/>
+            <a:off x="8419751" y="4815489"/>
             <a:ext cx="495649" cy="558615"/>
           </a:xfrm>
           <a:prstGeom prst="rect">
@@ -8413,7 +8543,7 @@
         </p:nvSpPr>
         <p:spPr>
           <a:xfrm>
-            <a:off x="10521267" y="4648200"/>
+            <a:off x="10521267" y="4724400"/>
             <a:ext cx="495649" cy="558615"/>
           </a:xfrm>
           <a:prstGeom prst="rect">
@@ -8459,7 +8589,7 @@
         </p:nvSpPr>
         <p:spPr>
           <a:xfrm>
-            <a:off x="2743200" y="5437121"/>
+            <a:off x="2743200" y="5513321"/>
             <a:ext cx="495649" cy="558615"/>
           </a:xfrm>
           <a:prstGeom prst="rect">
@@ -8505,7 +8635,7 @@
         </p:nvSpPr>
         <p:spPr>
           <a:xfrm>
-            <a:off x="3124200" y="6096000"/>
+            <a:off x="3124200" y="6172200"/>
             <a:ext cx="495649" cy="558615"/>
           </a:xfrm>
           <a:prstGeom prst="rect">
@@ -8553,7 +8683,7 @@
         </p:nvCxnSpPr>
         <p:spPr bwMode="auto">
           <a:xfrm flipV="1">
-            <a:off x="1467135" y="4496729"/>
+            <a:off x="1467135" y="4572929"/>
             <a:ext cx="0" cy="485455"/>
           </a:xfrm>
           <a:prstGeom prst="straightConnector1">
@@ -8570,7 +8700,7 @@
           </a:ln>
           <a:extLst>
             <a:ext uri="{AF507438-7753-43e0-B8FC-AC1667EBCBE1}">
-              <a14:hiddenEffects xmlns:a14="http://schemas.microsoft.com/office/drawing/2010/main" xmlns="">
+              <a14:hiddenEffects xmlns="" xmlns:a14="http://schemas.microsoft.com/office/drawing/2010/main">
                 <a:effectLst>
                   <a:outerShdw dist="35921" dir="2700000" algn="ctr" rotWithShape="0">
                     <a:schemeClr val="bg2"/>
@@ -8609,7 +8739,7 @@
         </p:nvSpPr>
         <p:spPr>
           <a:xfrm>
-            <a:off x="335870" y="4988775"/>
+            <a:off x="335870" y="5064975"/>
             <a:ext cx="1683923" cy="369332"/>
           </a:xfrm>
           <a:prstGeom prst="rect">
@@ -8642,6 +8772,105 @@
               </a:solidFill>
               <a:latin typeface="Gill Sans Light"/>
             </a:endParaRPr>
+          </a:p>
+        </p:txBody>
+      </p:sp>
+      <p:sp>
+        <p:nvSpPr>
+          <p:cNvPr id="3" name="TextBox 2">
+            <a:extLst>
+              <a:ext uri="{FF2B5EF4-FFF2-40B4-BE49-F238E27FC236}">
+                <a16:creationId xmlns:a16="http://schemas.microsoft.com/office/drawing/2014/main" id="{F13E486A-E64F-A8E0-CD86-0195293CF369}"/>
+              </a:ext>
+            </a:extLst>
+          </p:cNvPr>
+          <p:cNvSpPr txBox="1"/>
+          <p:nvPr/>
+        </p:nvSpPr>
+        <p:spPr>
+          <a:xfrm>
+            <a:off x="6317409" y="28244"/>
+            <a:ext cx="5791203" cy="3477875"/>
+          </a:xfrm>
+          <a:prstGeom prst="rect">
+            <a:avLst/>
+          </a:prstGeom>
+        </p:spPr>
+        <p:style>
+          <a:lnRef idx="1">
+            <a:schemeClr val="dk1"/>
+          </a:lnRef>
+          <a:fillRef idx="2">
+            <a:schemeClr val="dk1"/>
+          </a:fillRef>
+          <a:effectRef idx="1">
+            <a:schemeClr val="dk1"/>
+          </a:effectRef>
+          <a:fontRef idx="minor">
+            <a:schemeClr val="dk1"/>
+          </a:fontRef>
+        </p:style>
+        <p:txBody>
+          <a:bodyPr wrap="square" rtlCol="0">
+            <a:spAutoFit/>
+          </a:bodyPr>
+          <a:lstStyle/>
+          <a:p>
+            <a:r>
+              <a:rPr lang="en-US" sz="2000" dirty="0">
+                <a:latin typeface="Gill Sans Light"/>
+              </a:rPr>
+              <a:t>Time 2: active tasks’ remaining times: P1: 7</a:t>
+            </a:r>
+          </a:p>
+          <a:p>
+            <a:r>
+              <a:rPr lang="en-US" sz="2000" dirty="0">
+                <a:latin typeface="Gill Sans Light"/>
+              </a:rPr>
+              <a:t>Time 4: active tasks’ remaining times: P1: 5, P2: 14, so P1 continues to run</a:t>
+            </a:r>
+          </a:p>
+          <a:p>
+            <a:r>
+              <a:rPr lang="en-US" sz="2000" dirty="0">
+                <a:latin typeface="Gill Sans Light"/>
+              </a:rPr>
+              <a:t>Time 6: active tasks’ remaining times: P1: 3, P2: 14, P3: 21, so P1 continues to run</a:t>
+            </a:r>
+          </a:p>
+          <a:p>
+            <a:r>
+              <a:rPr lang="en-US" sz="2000" dirty="0">
+                <a:latin typeface="Gill Sans Light"/>
+              </a:rPr>
+              <a:t>Time 9: active tasks’ remaining times: P2: 14, P3: 21, so P2 starts to run (P1 is blocked for IO)</a:t>
+            </a:r>
+          </a:p>
+          <a:p>
+            <a:r>
+              <a:rPr lang="en-US" sz="2000" dirty="0">
+                <a:latin typeface="Gill Sans Light"/>
+              </a:rPr>
+              <a:t>Time 10: active tasks’ remaining times: P2: 13, P3: 21, so P2 continues to run (P1 </a:t>
+            </a:r>
+            <a:r>
+              <a:rPr lang="en-US" sz="2000">
+                <a:latin typeface="Gill Sans Light"/>
+              </a:rPr>
+              <a:t>is finished)</a:t>
+            </a:r>
+            <a:endParaRPr lang="en-US" sz="2000" dirty="0">
+              <a:latin typeface="Gill Sans Light"/>
+            </a:endParaRPr>
+          </a:p>
+          <a:p>
+            <a:r>
+              <a:rPr lang="en-US" sz="2000" dirty="0">
+                <a:latin typeface="Gill Sans Light"/>
+              </a:rPr>
+              <a:t>Time 23: active tasks’ remaining times: P3: 21, so P3 starts to run (P2 is blocked for IO)</a:t>
+            </a:r>
           </a:p>
         </p:txBody>
       </p:sp>
@@ -10857,7 +11086,7 @@
           </a:ln>
           <a:extLst>
             <a:ext uri="{AF507438-7753-43e0-B8FC-AC1667EBCBE1}">
-              <a14:hiddenEffects xmlns:a14="http://schemas.microsoft.com/office/drawing/2010/main" xmlns="">
+              <a14:hiddenEffects xmlns="" xmlns:a14="http://schemas.microsoft.com/office/drawing/2010/main">
                 <a:effectLst>
                   <a:outerShdw dist="35921" dir="2700000" algn="ctr" rotWithShape="0">
                     <a:schemeClr val="bg2"/>
@@ -10965,7 +11194,7 @@
           </a:ln>
           <a:extLst>
             <a:ext uri="{AF507438-7753-43e0-B8FC-AC1667EBCBE1}">
-              <a14:hiddenEffects xmlns:a14="http://schemas.microsoft.com/office/drawing/2010/main" xmlns="">
+              <a14:hiddenEffects xmlns="" xmlns:a14="http://schemas.microsoft.com/office/drawing/2010/main">
                 <a:effectLst>
                   <a:outerShdw dist="35921" dir="2700000" algn="ctr" rotWithShape="0">
                     <a:schemeClr val="bg2"/>
@@ -11073,7 +11302,7 @@
           </a:ln>
           <a:extLst>
             <a:ext uri="{AF507438-7753-43e0-B8FC-AC1667EBCBE1}">
-              <a14:hiddenEffects xmlns:a14="http://schemas.microsoft.com/office/drawing/2010/main" xmlns="">
+              <a14:hiddenEffects xmlns="" xmlns:a14="http://schemas.microsoft.com/office/drawing/2010/main">
                 <a:effectLst>
                   <a:outerShdw dist="35921" dir="2700000" algn="ctr" rotWithShape="0">
                     <a:schemeClr val="bg2"/>
@@ -17035,7 +17264,7 @@
           </a:ln>
           <a:extLst>
             <a:ext uri="{AF507438-7753-43e0-B8FC-AC1667EBCBE1}">
-              <a14:hiddenEffects xmlns:a14="http://schemas.microsoft.com/office/drawing/2010/main" xmlns="">
+              <a14:hiddenEffects xmlns="" xmlns:a14="http://schemas.microsoft.com/office/drawing/2010/main">
                 <a:effectLst>
                   <a:outerShdw dist="35921" dir="2700000" algn="ctr" rotWithShape="0">
                     <a:schemeClr val="bg2"/>
@@ -17143,7 +17372,7 @@
           </a:ln>
           <a:extLst>
             <a:ext uri="{AF507438-7753-43e0-B8FC-AC1667EBCBE1}">
-              <a14:hiddenEffects xmlns:a14="http://schemas.microsoft.com/office/drawing/2010/main" xmlns="">
+              <a14:hiddenEffects xmlns="" xmlns:a14="http://schemas.microsoft.com/office/drawing/2010/main">
                 <a:effectLst>
                   <a:outerShdw dist="35921" dir="2700000" algn="ctr" rotWithShape="0">
                     <a:schemeClr val="bg2"/>
@@ -17251,7 +17480,7 @@
           </a:ln>
           <a:extLst>
             <a:ext uri="{AF507438-7753-43e0-B8FC-AC1667EBCBE1}">
-              <a14:hiddenEffects xmlns:a14="http://schemas.microsoft.com/office/drawing/2010/main" xmlns="">
+              <a14:hiddenEffects xmlns="" xmlns:a14="http://schemas.microsoft.com/office/drawing/2010/main">
                 <a:effectLst>
                   <a:outerShdw dist="35921" dir="2700000" algn="ctr" rotWithShape="0">
                     <a:schemeClr val="bg2"/>
@@ -23144,7 +23373,7 @@
           </a:ln>
           <a:extLst>
             <a:ext uri="{AF507438-7753-43e0-B8FC-AC1667EBCBE1}">
-              <a14:hiddenEffects xmlns:a14="http://schemas.microsoft.com/office/drawing/2010/main" xmlns="">
+              <a14:hiddenEffects xmlns="" xmlns:a14="http://schemas.microsoft.com/office/drawing/2010/main">
                 <a:effectLst>
                   <a:outerShdw dist="35921" dir="2700000" algn="ctr" rotWithShape="0">
                     <a:schemeClr val="bg2"/>
@@ -23252,7 +23481,7 @@
           </a:ln>
           <a:extLst>
             <a:ext uri="{AF507438-7753-43e0-B8FC-AC1667EBCBE1}">
-              <a14:hiddenEffects xmlns:a14="http://schemas.microsoft.com/office/drawing/2010/main" xmlns="">
+              <a14:hiddenEffects xmlns="" xmlns:a14="http://schemas.microsoft.com/office/drawing/2010/main">
                 <a:effectLst>
                   <a:outerShdw dist="35921" dir="2700000" algn="ctr" rotWithShape="0">
                     <a:schemeClr val="bg2"/>
@@ -23360,7 +23589,7 @@
           </a:ln>
           <a:extLst>
             <a:ext uri="{AF507438-7753-43e0-B8FC-AC1667EBCBE1}">
-              <a14:hiddenEffects xmlns:a14="http://schemas.microsoft.com/office/drawing/2010/main" xmlns="">
+              <a14:hiddenEffects xmlns="" xmlns:a14="http://schemas.microsoft.com/office/drawing/2010/main">
                 <a:effectLst>
                   <a:outerShdw dist="35921" dir="2700000" algn="ctr" rotWithShape="0">
                     <a:schemeClr val="bg2"/>
@@ -23468,7 +23697,7 @@
           </a:ln>
           <a:extLst>
             <a:ext uri="{AF507438-7753-43e0-B8FC-AC1667EBCBE1}">
-              <a14:hiddenEffects xmlns:a14="http://schemas.microsoft.com/office/drawing/2010/main" xmlns="">
+              <a14:hiddenEffects xmlns="" xmlns:a14="http://schemas.microsoft.com/office/drawing/2010/main">
                 <a:effectLst>
                   <a:outerShdw dist="35921" dir="2700000" algn="ctr" rotWithShape="0">
                     <a:schemeClr val="bg2"/>
@@ -24962,7 +25191,7 @@
           </a:ln>
           <a:extLst>
             <a:ext uri="{AF507438-7753-43e0-B8FC-AC1667EBCBE1}">
-              <a14:hiddenEffects xmlns:a14="http://schemas.microsoft.com/office/drawing/2010/main" xmlns="">
+              <a14:hiddenEffects xmlns="" xmlns:a14="http://schemas.microsoft.com/office/drawing/2010/main">
                 <a:effectLst>
                   <a:outerShdw dist="35921" dir="2700000" algn="ctr" rotWithShape="0">
                     <a:schemeClr val="bg2"/>
@@ -25070,7 +25299,7 @@
           </a:ln>
           <a:extLst>
             <a:ext uri="{AF507438-7753-43e0-B8FC-AC1667EBCBE1}">
-              <a14:hiddenEffects xmlns:a14="http://schemas.microsoft.com/office/drawing/2010/main" xmlns="">
+              <a14:hiddenEffects xmlns="" xmlns:a14="http://schemas.microsoft.com/office/drawing/2010/main">
                 <a:effectLst>
                   <a:outerShdw dist="35921" dir="2700000" algn="ctr" rotWithShape="0">
                     <a:schemeClr val="bg2"/>
@@ -25178,7 +25407,7 @@
           </a:ln>
           <a:extLst>
             <a:ext uri="{AF507438-7753-43e0-B8FC-AC1667EBCBE1}">
-              <a14:hiddenEffects xmlns:a14="http://schemas.microsoft.com/office/drawing/2010/main" xmlns="">
+              <a14:hiddenEffects xmlns="" xmlns:a14="http://schemas.microsoft.com/office/drawing/2010/main">
                 <a:effectLst>
                   <a:outerShdw dist="35921" dir="2700000" algn="ctr" rotWithShape="0">
                     <a:schemeClr val="bg2"/>
@@ -25286,7 +25515,7 @@
           </a:ln>
           <a:extLst>
             <a:ext uri="{AF507438-7753-43e0-B8FC-AC1667EBCBE1}">
-              <a14:hiddenEffects xmlns:a14="http://schemas.microsoft.com/office/drawing/2010/main" xmlns="">
+              <a14:hiddenEffects xmlns="" xmlns:a14="http://schemas.microsoft.com/office/drawing/2010/main">
                 <a:effectLst>
                   <a:outerShdw dist="35921" dir="2700000" algn="ctr" rotWithShape="0">
                     <a:schemeClr val="bg2"/>
@@ -25390,17 +25619,17 @@
           <a:effectLst/>
           <a:extLst>
             <a:ext uri="{FAA26D3D-D897-4be2-8F04-BA451C77F1D7}">
-              <ma14:placeholderFlag xmlns="" xmlns:ma14="http://schemas.microsoft.com/office/mac/drawingml/2011/main" val="1"/>
+              <ma14:placeholderFlag xmlns:ma14="http://schemas.microsoft.com/office/mac/drawingml/2011/main" xmlns="" val="1"/>
             </a:ext>
             <a:ext uri="{909E8E84-426E-40dd-AFC4-6F175D3DCCD1}">
-              <a14:hiddenFill xmlns="" xmlns:a14="http://schemas.microsoft.com/office/drawing/2010/main">
+              <a14:hiddenFill xmlns:a14="http://schemas.microsoft.com/office/drawing/2010/main" xmlns="">
                 <a:solidFill>
                   <a:schemeClr val="bg1"/>
                 </a:solidFill>
               </a14:hiddenFill>
             </a:ext>
             <a:ext uri="{91240B29-F687-4f45-9708-019B960494DF}">
-              <a14:hiddenLine xmlns="" xmlns:a14="http://schemas.microsoft.com/office/drawing/2010/main" w="12700">
+              <a14:hiddenLine xmlns:a14="http://schemas.microsoft.com/office/drawing/2010/main" xmlns="" w="12700">
                 <a:pattFill prst="narHorz">
                   <a:fgClr>
                     <a:schemeClr val="tx1"/>
@@ -25415,7 +25644,7 @@
               </a14:hiddenLine>
             </a:ext>
             <a:ext uri="{AF507438-7753-43e0-B8FC-AC1667EBCBE1}">
-              <a14:hiddenEffects xmlns="" xmlns:a14="http://schemas.microsoft.com/office/drawing/2010/main">
+              <a14:hiddenEffects xmlns:a14="http://schemas.microsoft.com/office/drawing/2010/main" xmlns="">
                 <a:effectLst>
                   <a:outerShdw blurRad="63500" dist="38099" dir="2700000" algn="ctr" rotWithShape="0">
                     <a:schemeClr val="bg2">
@@ -25915,7 +26144,7 @@
         <a:effectLst/>
         <a:extLst>
           <a:ext uri="{AF507438-7753-43e0-B8FC-AC1667EBCBE1}">
-            <a14:hiddenEffects xmlns="" xmlns:a14="http://schemas.microsoft.com/office/drawing/2010/main">
+            <a14:hiddenEffects xmlns:a14="http://schemas.microsoft.com/office/drawing/2010/main" xmlns="">
               <a:effectLst>
                 <a:outerShdw dist="35921" dir="2700000" algn="ctr" rotWithShape="0">
                   <a:schemeClr val="bg2"/>
@@ -25988,7 +26217,7 @@
         <a:effectLst/>
         <a:extLst>
           <a:ext uri="{AF507438-7753-43e0-B8FC-AC1667EBCBE1}">
-            <a14:hiddenEffects xmlns="" xmlns:a14="http://schemas.microsoft.com/office/drawing/2010/main">
+            <a14:hiddenEffects xmlns:a14="http://schemas.microsoft.com/office/drawing/2010/main" xmlns="">
               <a:effectLst>
                 <a:outerShdw dist="35921" dir="2700000" algn="ctr" rotWithShape="0">
                   <a:schemeClr val="bg2"/>
